--- a/presentation/Portofolio_Ilmuwan_Data_Syamsuddin_Wisnubroto.pptx
+++ b/presentation/Portofolio_Ilmuwan_Data_Syamsuddin_Wisnubroto.pptx
@@ -9972,7 +9972,7 @@
                 </a:solidFill>
                 <a:latin typeface="Calibri"/>
               </a:rPr>
-              <a:t>portfolio-ilmuwan-data — 11 notebook, ekspor HTML, 24 grafik, artefak JSON/CSV</a:t>
+              <a:t>portfolio-ilmuwan-data-lengkap — 11 notebook, ekspor HTML, 24 grafik, artefak JSON/CSV</a:t>
             </a:r>
           </a:p>
           <a:p>
